--- a/decks/hist-vikings-saxons/hist-vikings-saxons_ch6_hardrada.pptx
+++ b/decks/hist-vikings-saxons/hist-vikings-saxons_ch6_hardrada.pptx
@@ -126,30 +126,30 @@
   <p:extLst>
     <p:ext uri="{521415D9-36F7-43E2-AB2F-B90AF26B5E84}">
       <p14:sectionLst xmlns:p14="http://schemas.microsoft.com/office/powerpoint/2010/main">
-        <p14:section name="Opening" id="{767746b5-9091-f927-c16b-7a73650d68c4}">
+        <p14:section name="Opening" id="{13906f6c-6890-46a9-cfea-fcfbb84f5216}">
           <p14:sldIdLst>
             <p14:sldId id="256"/>
           </p14:sldIdLst>
         </p14:section>
-        <p14:section name="Gate" id="{c31ee883-86a7-bcf1-ae86-e18a9d020f70}">
+        <p14:section name="Gate" id="{531580ba-a148-2599-0fe6-61643093dccb}">
           <p14:sldIdLst>
             <p14:sldId id="257"/>
             <p14:sldId id="258"/>
           </p14:sldIdLst>
         </p14:section>
-        <p14:section name="Pre-teach" id="{687db1ba-74f3-8059-d705-4f6cfb571abd}">
+        <p14:section name="Pre-teach" id="{2be2bdc2-5635-a077-97be-5e6e8e38dd5a}">
           <p14:sldIdLst>
             <p14:sldId id="259"/>
             <p14:sldId id="260"/>
           </p14:sldIdLst>
         </p14:section>
-        <p14:section name="Read-along" id="{c81e1981-656b-b748-c13b-5d4437eb1051}">
+        <p14:section name="Read-along" id="{2a3cdc34-4c23-11d6-64fb-3cbee07ab8ec}">
           <p14:sldIdLst>
             <p14:sldId id="261"/>
             <p14:sldId id="262"/>
           </p14:sldIdLst>
         </p14:section>
-        <p14:section name="Teach" id="{ca134476-b928-3ddc-88e4-054d91131dac}">
+        <p14:section name="Teach" id="{bba20ef4-ec59-3086-dc22-fce9192ea456}">
           <p14:sldIdLst>
             <p14:sldId id="263"/>
             <p14:sldId id="264"/>
@@ -158,7 +158,7 @@
             <p14:sldId id="267"/>
           </p14:sldIdLst>
         </p14:section>
-        <p14:section name="Routes" id="{b03ac048-2cee-d75a-9a3d-dab75bb0e568}">
+        <p14:section name="Routes" id="{657633a5-fff7-9c12-4c33-380b06ad424d}">
           <p14:sldIdLst>
             <p14:sldId id="268"/>
             <p14:sldId id="269"/>
@@ -166,12 +166,12 @@
             <p14:sldId id="271"/>
           </p14:sldIdLst>
         </p14:section>
-        <p14:section name="Close" id="{656e3525-7fab-930d-62e9-4fa579ca138c}">
+        <p14:section name="Close" id="{873a815b-2bab-dfd2-e4ca-4474d5f5f579}">
           <p14:sldIdLst>
             <p14:sldId id="272"/>
           </p14:sldIdLst>
         </p14:section>
-        <p14:section name="Answers" id="{0f13f119-5614-1982-38a8-43a8ebc580c5}">
+        <p14:section name="Answers" id="{768110a3-ec7a-873d-2069-53db5e422c90}">
           <p14:sldIdLst>
             <p14:sldId id="273"/>
             <p14:sldId id="274"/>
